--- a/deck/Prototype Submission Template _ CoCo CLI Hackathon GCC Edition.pptx
+++ b/deck/Prototype Submission Template _ CoCo CLI Hackathon GCC Edition.pptx
@@ -3172,7 +3172,7 @@
               </a:defRPr>
             </a:pPr>
             <a:r>
-              <a:t>Team Name : SupplyChainIQ</a:t>
+              <a:t>Team Name : Aegis</a:t>
             </a:r>
           </a:p>
           <a:p>
